--- a/画图/stage2结果.pptx
+++ b/画图/stage2结果.pptx
@@ -342,7 +342,7 @@
             </a:r>
             <a:r>
               <a:rPr lang="zh-CN" altLang="en-US" dirty="0"/>
-              <a:t>真实受体（</a:t>
+              <a:t>各模型在真实受体（</a:t>
             </a:r>
             <a:r>
               <a:rPr lang="en-US" altLang="zh-CN" dirty="0"/>
@@ -373,8 +373,12 @@
               <a:t>F1 </a:t>
             </a:r>
             <a:r>
+              <a:rPr lang="zh-CN" altLang="en-US"/>
+              <a:t>与配</a:t>
+            </a:r>
+            <a:r>
               <a:rPr lang="zh-CN" altLang="en-US" dirty="0"/>
-              <a:t>与 配体身份匹配正确率。六轴自顶端顺时针为总体 </a:t>
+              <a:t>体身份匹配正确率。六轴自顶端顺时针为总体 </a:t>
             </a:r>
             <a:r>
               <a:rPr lang="en-US" altLang="zh-CN" dirty="0"/>

--- a/画图/stage2结果.pptx
+++ b/画图/stage2结果.pptx
@@ -289,427 +289,427 @@
 </file>
 
 <file path=ppt/notesSlides/notesSlide1.xml><?xml version="1.0" encoding="utf-8"?>
-<p:notes xmlns:a="http://schemas.openxmlformats.org/drawingml/2006/main" xmlns:r="http://schemas.openxmlformats.org/officeDocument/2006/relationships" xmlns:p="http://schemas.openxmlformats.org/presentationml/2006/main">
-  <p:cSld>
-    <p:spTree>
-      <p:nvGrpSpPr>
-        <p:cNvPr id="1" name=""/>
-        <p:cNvGrpSpPr/>
-        <p:nvPr/>
-      </p:nvGrpSpPr>
-      <p:grpSpPr>
-        <a:xfrm>
-          <a:off x="0" y="0"/>
-          <a:ext cx="0" cy="0"/>
-          <a:chOff x="0" y="0"/>
-          <a:chExt cx="0" cy="0"/>
-        </a:xfrm>
-      </p:grpSpPr>
-      <p:sp>
-        <p:nvSpPr>
-          <p:cNvPr id="2" name="Slide Image Placeholder 1"/>
-          <p:cNvSpPr>
-            <a:spLocks noGrp="1" noRot="1" noChangeAspect="1"/>
-          </p:cNvSpPr>
-          <p:nvPr>
-            <p:ph type="sldImg"/>
-          </p:nvPr>
-        </p:nvSpPr>
-        <p:spPr/>
-      </p:sp>
-      <p:sp>
-        <p:nvSpPr>
-          <p:cNvPr id="3" name="Notes Placeholder 2"/>
-          <p:cNvSpPr>
-            <a:spLocks noGrp="1"/>
-          </p:cNvSpPr>
-          <p:nvPr>
-            <p:ph type="body" idx="1"/>
-          </p:nvPr>
-        </p:nvSpPr>
-        <p:spPr/>
-        <p:txBody>
-          <a:bodyPr/>
-          <a:lstStyle/>
-          <a:p>
-            <a:r>
-              <a:rPr lang="zh-CN" altLang="en-US" dirty="0"/>
-              <a:t>图 </a:t>
-            </a:r>
-            <a:r>
-              <a:rPr lang="en-US" altLang="zh-CN" dirty="0"/>
-              <a:t>4 | </a:t>
-            </a:r>
-            <a:r>
-              <a:rPr lang="zh-CN" altLang="en-US" dirty="0"/>
-              <a:t>各模型在真实受体（</a:t>
-            </a:r>
-            <a:r>
-              <a:rPr lang="en-US" altLang="zh-CN" dirty="0"/>
-              <a:t>a</a:t>
-            </a:r>
-            <a:r>
-              <a:rPr lang="zh-CN" altLang="en-US" dirty="0"/>
-              <a:t>）和 </a:t>
-            </a:r>
-            <a:r>
-              <a:rPr lang="en-US" altLang="zh-CN" dirty="0"/>
-              <a:t>CryoAtom2</a:t>
-            </a:r>
-            <a:r>
-              <a:rPr lang="zh-CN" altLang="en-US" dirty="0"/>
-              <a:t>（</a:t>
-            </a:r>
-            <a:r>
-              <a:rPr lang="en-US" altLang="zh-CN" dirty="0"/>
-              <a:t>b</a:t>
-            </a:r>
-            <a:r>
-              <a:rPr lang="zh-CN" altLang="en-US" dirty="0"/>
-              <a:t>）条件下的前景 </a:t>
-            </a:r>
-            <a:r>
-              <a:rPr lang="en-US" altLang="zh-CN" dirty="0"/>
-              <a:t>F1 </a:t>
-            </a:r>
-            <a:r>
-              <a:rPr lang="zh-CN" altLang="en-US"/>
-              <a:t>与配</a:t>
-            </a:r>
-            <a:r>
-              <a:rPr lang="zh-CN" altLang="en-US" dirty="0"/>
-              <a:t>体身份匹配正确率。六轴自顶端顺时针为总体 </a:t>
-            </a:r>
-            <a:r>
-              <a:rPr lang="en-US" altLang="zh-CN" dirty="0"/>
-              <a:t>SMILES</a:t>
-            </a:r>
-            <a:r>
-              <a:rPr lang="zh-CN" altLang="en-US" dirty="0"/>
-              <a:t>、小分子、糖、前景 </a:t>
-            </a:r>
-            <a:r>
-              <a:rPr lang="en-US" altLang="zh-CN" dirty="0"/>
-              <a:t>F1</a:t>
-            </a:r>
-            <a:r>
-              <a:rPr lang="zh-CN" altLang="en-US" dirty="0"/>
-              <a:t>、金属离子和肽类，径向坐标为 </a:t>
-            </a:r>
-            <a:r>
-              <a:rPr lang="en-US" altLang="zh-CN" dirty="0"/>
-              <a:t>20–100%</a:t>
-            </a:r>
-            <a:r>
-              <a:rPr lang="zh-CN" altLang="en-US" dirty="0"/>
-              <a:t>。真实受体条件下有 </a:t>
-            </a:r>
-            <a:r>
-              <a:rPr lang="en-US" altLang="zh-CN" dirty="0"/>
-              <a:t>1,653 </a:t>
-            </a:r>
-            <a:r>
-              <a:rPr lang="zh-CN" altLang="en-US" dirty="0"/>
-              <a:t>个待分类和匹配的候选，其中</a:t>
-            </a:r>
-            <a:r>
-              <a:rPr lang="en-US" altLang="zh-CN" dirty="0"/>
-              <a:t>1,238 </a:t>
-            </a:r>
-            <a:r>
-              <a:rPr lang="zh-CN" altLang="en-US" dirty="0"/>
-              <a:t>个为前景，具体对应 </a:t>
-            </a:r>
-            <a:r>
-              <a:rPr lang="en-US" altLang="zh-CN" dirty="0"/>
-              <a:t>389 </a:t>
-            </a:r>
-            <a:r>
-              <a:rPr lang="zh-CN" altLang="en-US" dirty="0"/>
-              <a:t>个小分子、</a:t>
-            </a:r>
-            <a:r>
-              <a:rPr lang="en-US" altLang="zh-CN" dirty="0"/>
-              <a:t>284 </a:t>
-            </a:r>
-            <a:r>
-              <a:rPr lang="zh-CN" altLang="en-US" dirty="0"/>
-              <a:t>个糖、</a:t>
-            </a:r>
-            <a:r>
-              <a:rPr lang="en-US" altLang="zh-CN" dirty="0"/>
-              <a:t>564 </a:t>
-            </a:r>
-            <a:r>
-              <a:rPr lang="zh-CN" altLang="en-US" dirty="0"/>
-              <a:t>个金属离子和</a:t>
-            </a:r>
-            <a:r>
-              <a:rPr lang="en-US" altLang="zh-CN" dirty="0"/>
-              <a:t>1 </a:t>
-            </a:r>
-            <a:r>
-              <a:rPr lang="zh-CN" altLang="en-US" dirty="0"/>
-              <a:t>个肽；</a:t>
-            </a:r>
-            <a:r>
-              <a:rPr lang="en-US" altLang="zh-CN" dirty="0"/>
-              <a:t>CryoAtom2 </a:t>
-            </a:r>
-            <a:r>
-              <a:rPr lang="zh-CN" altLang="en-US" dirty="0"/>
-              <a:t>条件下有 </a:t>
-            </a:r>
-            <a:r>
-              <a:rPr lang="en-US" altLang="zh-CN" dirty="0"/>
-              <a:t>1,651 </a:t>
-            </a:r>
-            <a:r>
-              <a:rPr lang="zh-CN" altLang="en-US" dirty="0"/>
-              <a:t>个</a:t>
-            </a:r>
-            <a:r>
-              <a:rPr lang="zh-CN" altLang="zh-CN" sz="1200" kern="1200" dirty="0">
-                <a:solidFill>
-                  <a:schemeClr val="tx1"/>
-                </a:solidFill>
-                <a:effectLst/>
-                <a:latin typeface="+mn-lt"/>
-                <a:ea typeface="+mn-ea"/>
-                <a:cs typeface="+mn-cs"/>
-              </a:rPr>
-              <a:t>待分类和匹配</a:t>
-            </a:r>
-            <a:r>
-              <a:rPr lang="zh-CN" altLang="en-US" sz="1200" kern="1200" dirty="0">
-                <a:solidFill>
-                  <a:schemeClr val="tx1"/>
-                </a:solidFill>
-                <a:effectLst/>
-                <a:latin typeface="+mn-lt"/>
-                <a:ea typeface="+mn-ea"/>
-                <a:cs typeface="+mn-cs"/>
-              </a:rPr>
-              <a:t>的</a:t>
-            </a:r>
-            <a:r>
-              <a:rPr lang="zh-CN" altLang="en-US" dirty="0"/>
-              <a:t>候选，其中 </a:t>
-            </a:r>
-            <a:r>
-              <a:rPr lang="en-US" altLang="zh-CN" dirty="0"/>
-              <a:t>1,160 </a:t>
-            </a:r>
-            <a:r>
-              <a:rPr lang="zh-CN" altLang="en-US" dirty="0"/>
-              <a:t>个为前景，具体对应 </a:t>
-            </a:r>
-            <a:r>
-              <a:rPr lang="en-US" altLang="zh-CN" dirty="0"/>
-              <a:t>348 </a:t>
-            </a:r>
-            <a:r>
-              <a:rPr lang="zh-CN" altLang="en-US" dirty="0"/>
-              <a:t>个小分子、</a:t>
-            </a:r>
-            <a:r>
-              <a:rPr lang="en-US" altLang="zh-CN" dirty="0"/>
-              <a:t>277</a:t>
-            </a:r>
-            <a:r>
-              <a:rPr lang="zh-CN" altLang="en-US" dirty="0"/>
-              <a:t>个糖、</a:t>
-            </a:r>
-            <a:r>
-              <a:rPr lang="en-US" altLang="zh-CN" dirty="0"/>
-              <a:t>534</a:t>
-            </a:r>
-            <a:r>
-              <a:rPr lang="zh-CN" altLang="en-US" dirty="0"/>
-              <a:t>个金属离子和 </a:t>
-            </a:r>
-            <a:r>
-              <a:rPr lang="en-US" altLang="zh-CN" dirty="0"/>
-              <a:t>1 </a:t>
-            </a:r>
-            <a:r>
-              <a:rPr lang="zh-CN" altLang="en-US" dirty="0"/>
-              <a:t>个肽。特别地，菱形表示 </a:t>
-            </a:r>
-            <a:r>
-              <a:rPr lang="en-US" altLang="zh-CN" dirty="0"/>
-              <a:t>EMERALD-ID </a:t>
-            </a:r>
-            <a:r>
-              <a:rPr lang="zh-CN" altLang="en-US" dirty="0"/>
-              <a:t>在独立小分子测试集上的准确率，并只在返回有效预测结果的位点上取平均，其中真实受体条件下有</a:t>
-            </a:r>
-            <a:r>
-              <a:rPr lang="en-US" altLang="zh-CN" dirty="0"/>
-              <a:t>282 </a:t>
-            </a:r>
-            <a:r>
-              <a:rPr lang="zh-CN" altLang="en-US" dirty="0"/>
-              <a:t>个位点返回了预测结果，</a:t>
-            </a:r>
-            <a:r>
-              <a:rPr lang="en-US" altLang="zh-CN" dirty="0"/>
-              <a:t>CryoAtom2 </a:t>
-            </a:r>
-            <a:r>
-              <a:rPr lang="zh-CN" altLang="en-US" dirty="0"/>
-              <a:t>条件下则有</a:t>
-            </a:r>
-            <a:r>
-              <a:rPr lang="en-US" altLang="zh-CN" dirty="0"/>
-              <a:t>313 </a:t>
-            </a:r>
-            <a:r>
-              <a:rPr lang="zh-CN" altLang="en-US" dirty="0"/>
-              <a:t>个位点返回了预测结果。</a:t>
-            </a:r>
-            <a:endParaRPr lang="en-US" dirty="0"/>
-          </a:p>
-        </p:txBody>
-      </p:sp>
-      <p:sp>
-        <p:nvSpPr>
-          <p:cNvPr id="4" name="Slide Number Placeholder 3"/>
-          <p:cNvSpPr>
-            <a:spLocks noGrp="1"/>
-          </p:cNvSpPr>
-          <p:nvPr>
-            <p:ph type="sldNum" sz="quarter" idx="10"/>
-          </p:nvPr>
-        </p:nvSpPr>
-        <p:spPr/>
-        <p:txBody>
-          <a:bodyPr/>
-          <a:lstStyle/>
-          <a:p>
-            <a:fld id="{F7021451-1387-4CA6-816F-3879F97B5CBC}" type="slidenum">
-              <a:rPr lang="en-US"/>
-              <a:t>1</a:t>
-            </a:fld>
-            <a:endParaRPr lang="en-US"/>
-          </a:p>
-        </p:txBody>
-      </p:sp>
-    </p:spTree>
-    <p:extLst>
-      <p:ext uri="{BB962C8B-B14F-4D97-AF65-F5344CB8AC3E}">
-        <p14:creationId xmlns:p14="http://schemas.microsoft.com/office/powerpoint/2010/main" val="1024086991"/>
-      </p:ext>
-    </p:extLst>
-  </p:cSld>
-  <p:clrMapOvr>
-    <a:masterClrMapping/>
-  </p:clrMapOvr>
-</p:notes>
+<ns0:notes xmlns:ns0="http://schemas.openxmlformats.org/presentationml/2006/main" xmlns:ns1="http://schemas.openxmlformats.org/drawingml/2006/main" xmlns:ns2="http://schemas.microsoft.com/office/powerpoint/2010/main">
+  <ns0:cSld>
+    <ns0:spTree>
+      <ns0:nvGrpSpPr>
+        <ns0:cNvPr id="1" name=""/>
+        <ns0:cNvGrpSpPr/>
+        <ns0:nvPr/>
+      </ns0:nvGrpSpPr>
+      <ns0:grpSpPr>
+        <ns1:xfrm>
+          <ns1:off x="0" y="0"/>
+          <ns1:ext cx="0" cy="0"/>
+          <ns1:chOff x="0" y="0"/>
+          <ns1:chExt cx="0" cy="0"/>
+        </ns1:xfrm>
+      </ns0:grpSpPr>
+      <ns0:sp>
+        <ns0:nvSpPr>
+          <ns0:cNvPr id="2" name="Slide Image Placeholder 1"/>
+          <ns0:cNvSpPr>
+            <ns1:spLocks noGrp="1" noRot="1" noChangeAspect="1"/>
+          </ns0:cNvSpPr>
+          <ns0:nvPr>
+            <ns0:ph type="sldImg"/>
+          </ns0:nvPr>
+        </ns0:nvSpPr>
+        <ns0:spPr/>
+      </ns0:sp>
+      <ns0:sp>
+        <ns0:nvSpPr>
+          <ns0:cNvPr id="3" name="Notes Placeholder 2"/>
+          <ns0:cNvSpPr>
+            <ns1:spLocks noGrp="1"/>
+          </ns0:cNvSpPr>
+          <ns0:nvPr>
+            <ns0:ph type="body" idx="1"/>
+          </ns0:nvPr>
+        </ns0:nvSpPr>
+        <ns0:spPr/>
+        <ns0:txBody>
+          <ns1:bodyPr/>
+          <ns1:lstStyle/>
+          <ns1:p>
+            <ns1:r>
+              <ns1:rPr lang="zh-CN" altLang="en-US" dirty="0"/>
+              <ns1:t/>
+            </ns1:r>
+            <ns1:r>
+              <ns1:rPr lang="en-US" altLang="zh-CN" dirty="0"/>
+              <ns1:t/>
+            </ns1:r>
+            <ns1:r>
+              <ns1:rPr lang="zh-CN" altLang="en-US" dirty="0"/>
+              <ns1:t>各模型在真实受体（</ns1:t>
+            </ns1:r>
+            <ns1:r>
+              <ns1:rPr lang="en-US" altLang="zh-CN" dirty="0"/>
+              <ns1:t>a</ns1:t>
+            </ns1:r>
+            <ns1:r>
+              <ns1:rPr lang="zh-CN" altLang="en-US" dirty="0"/>
+              <ns1:t>）和 </ns1:t>
+            </ns1:r>
+            <ns1:r>
+              <ns1:rPr lang="en-US" altLang="zh-CN" dirty="0"/>
+              <ns1:t>CryoAtom2</ns1:t>
+            </ns1:r>
+            <ns1:r>
+              <ns1:rPr lang="zh-CN" altLang="en-US" dirty="0"/>
+              <ns1:t>（</ns1:t>
+            </ns1:r>
+            <ns1:r>
+              <ns1:rPr lang="en-US" altLang="zh-CN" dirty="0"/>
+              <ns1:t>b</ns1:t>
+            </ns1:r>
+            <ns1:r>
+              <ns1:rPr lang="zh-CN" altLang="en-US" dirty="0"/>
+              <ns1:t>）条件下的前景 </ns1:t>
+            </ns1:r>
+            <ns1:r>
+              <ns1:rPr lang="en-US" altLang="zh-CN" dirty="0"/>
+              <ns1:t>F1 </ns1:t>
+            </ns1:r>
+            <ns1:r>
+              <ns1:rPr lang="zh-CN" altLang="en-US"/>
+              <ns1:t>与配</ns1:t>
+            </ns1:r>
+            <ns1:r>
+              <ns1:rPr lang="zh-CN" altLang="en-US" dirty="0"/>
+              <ns1:t>体身份匹配正确率。六轴自顶端顺时针为总体 </ns1:t>
+            </ns1:r>
+            <ns1:r>
+              <ns1:rPr lang="en-US" altLang="zh-CN" dirty="0"/>
+              <ns1:t>SMILES</ns1:t>
+            </ns1:r>
+            <ns1:r>
+              <ns1:rPr lang="zh-CN" altLang="en-US" dirty="0"/>
+              <ns1:t>、小分子、糖、前景 </ns1:t>
+            </ns1:r>
+            <ns1:r>
+              <ns1:rPr lang="en-US" altLang="zh-CN" dirty="0"/>
+              <ns1:t>F1</ns1:t>
+            </ns1:r>
+            <ns1:r>
+              <ns1:rPr lang="zh-CN" altLang="en-US" dirty="0"/>
+              <ns1:t>、金属离子和肽类，径向坐标为 </ns1:t>
+            </ns1:r>
+            <ns1:r>
+              <ns1:rPr lang="en-US" altLang="zh-CN" dirty="0"/>
+              <ns1:t>20–100%</ns1:t>
+            </ns1:r>
+            <ns1:r>
+              <ns1:rPr lang="zh-CN" altLang="en-US" dirty="0"/>
+              <ns1:t>。真实受体条件下有 </ns1:t>
+            </ns1:r>
+            <ns1:r>
+              <ns1:rPr lang="en-US" altLang="zh-CN" dirty="0"/>
+              <ns1:t>1,653 </ns1:t>
+            </ns1:r>
+            <ns1:r>
+              <ns1:rPr lang="zh-CN" altLang="en-US" dirty="0"/>
+              <ns1:t>个待分类和匹配的候选，其中</ns1:t>
+            </ns1:r>
+            <ns1:r>
+              <ns1:rPr lang="en-US" altLang="zh-CN" dirty="0"/>
+              <ns1:t>1,238 </ns1:t>
+            </ns1:r>
+            <ns1:r>
+              <ns1:rPr lang="zh-CN" altLang="en-US" dirty="0"/>
+              <ns1:t>个为前景，具体对应 </ns1:t>
+            </ns1:r>
+            <ns1:r>
+              <ns1:rPr lang="en-US" altLang="zh-CN" dirty="0"/>
+              <ns1:t>389 </ns1:t>
+            </ns1:r>
+            <ns1:r>
+              <ns1:rPr lang="zh-CN" altLang="en-US" dirty="0"/>
+              <ns1:t>个小分子、</ns1:t>
+            </ns1:r>
+            <ns1:r>
+              <ns1:rPr lang="en-US" altLang="zh-CN" dirty="0"/>
+              <ns1:t>284 </ns1:t>
+            </ns1:r>
+            <ns1:r>
+              <ns1:rPr lang="zh-CN" altLang="en-US" dirty="0"/>
+              <ns1:t>个糖、</ns1:t>
+            </ns1:r>
+            <ns1:r>
+              <ns1:rPr lang="en-US" altLang="zh-CN" dirty="0"/>
+              <ns1:t>564 </ns1:t>
+            </ns1:r>
+            <ns1:r>
+              <ns1:rPr lang="zh-CN" altLang="en-US" dirty="0"/>
+              <ns1:t>个金属离子和</ns1:t>
+            </ns1:r>
+            <ns1:r>
+              <ns1:rPr lang="en-US" altLang="zh-CN" dirty="0"/>
+              <ns1:t>1 </ns1:t>
+            </ns1:r>
+            <ns1:r>
+              <ns1:rPr lang="zh-CN" altLang="en-US" dirty="0"/>
+              <ns1:t>个肽；</ns1:t>
+            </ns1:r>
+            <ns1:r>
+              <ns1:rPr lang="en-US" altLang="zh-CN" dirty="0"/>
+              <ns1:t>CryoAtom2 </ns1:t>
+            </ns1:r>
+            <ns1:r>
+              <ns1:rPr lang="zh-CN" altLang="en-US" dirty="0"/>
+              <ns1:t>条件下有 </ns1:t>
+            </ns1:r>
+            <ns1:r>
+              <ns1:rPr lang="en-US" altLang="zh-CN" dirty="0"/>
+              <ns1:t>1,651 </ns1:t>
+            </ns1:r>
+            <ns1:r>
+              <ns1:rPr lang="zh-CN" altLang="en-US" dirty="0"/>
+              <ns1:t>个</ns1:t>
+            </ns1:r>
+            <ns1:r>
+              <ns1:rPr lang="zh-CN" altLang="zh-CN" sz="1200" kern="1200" dirty="0">
+                <ns1:solidFill>
+                  <ns1:schemeClr val="tx1"/>
+                </ns1:solidFill>
+                <ns1:effectLst/>
+                <ns1:latin typeface="+mn-lt"/>
+                <ns1:ea typeface="+mn-ea"/>
+                <ns1:cs typeface="+mn-cs"/>
+              </ns1:rPr>
+              <ns1:t>待分类和匹配</ns1:t>
+            </ns1:r>
+            <ns1:r>
+              <ns1:rPr lang="zh-CN" altLang="en-US" sz="1200" kern="1200" dirty="0">
+                <ns1:solidFill>
+                  <ns1:schemeClr val="tx1"/>
+                </ns1:solidFill>
+                <ns1:effectLst/>
+                <ns1:latin typeface="+mn-lt"/>
+                <ns1:ea typeface="+mn-ea"/>
+                <ns1:cs typeface="+mn-cs"/>
+              </ns1:rPr>
+              <ns1:t>的</ns1:t>
+            </ns1:r>
+            <ns1:r>
+              <ns1:rPr lang="zh-CN" altLang="en-US" dirty="0"/>
+              <ns1:t>候选，其中 </ns1:t>
+            </ns1:r>
+            <ns1:r>
+              <ns1:rPr lang="en-US" altLang="zh-CN" dirty="0"/>
+              <ns1:t>1,160 </ns1:t>
+            </ns1:r>
+            <ns1:r>
+              <ns1:rPr lang="zh-CN" altLang="en-US" dirty="0"/>
+              <ns1:t>个为前景，具体对应 </ns1:t>
+            </ns1:r>
+            <ns1:r>
+              <ns1:rPr lang="en-US" altLang="zh-CN" dirty="0"/>
+              <ns1:t>348 </ns1:t>
+            </ns1:r>
+            <ns1:r>
+              <ns1:rPr lang="zh-CN" altLang="en-US" dirty="0"/>
+              <ns1:t>个小分子、</ns1:t>
+            </ns1:r>
+            <ns1:r>
+              <ns1:rPr lang="en-US" altLang="zh-CN" dirty="0"/>
+              <ns1:t>277</ns1:t>
+            </ns1:r>
+            <ns1:r>
+              <ns1:rPr lang="zh-CN" altLang="en-US" dirty="0"/>
+              <ns1:t>个糖、</ns1:t>
+            </ns1:r>
+            <ns1:r>
+              <ns1:rPr lang="en-US" altLang="zh-CN" dirty="0"/>
+              <ns1:t>534</ns1:t>
+            </ns1:r>
+            <ns1:r>
+              <ns1:rPr lang="zh-CN" altLang="en-US" dirty="0"/>
+              <ns1:t>个金属离子和 </ns1:t>
+            </ns1:r>
+            <ns1:r>
+              <ns1:rPr lang="en-US" altLang="zh-CN" dirty="0"/>
+              <ns1:t>1 </ns1:t>
+            </ns1:r>
+            <ns1:r>
+              <ns1:rPr lang="zh-CN" altLang="en-US" dirty="0"/>
+              <ns1:t>个肽。特别地，菱形表示 </ns1:t>
+            </ns1:r>
+            <ns1:r>
+              <ns1:rPr lang="en-US" altLang="zh-CN" dirty="0"/>
+              <ns1:t>EMERALD-ID </ns1:t>
+            </ns1:r>
+            <ns1:r>
+              <ns1:rPr lang="zh-CN" altLang="en-US" dirty="0"/>
+              <ns1:t>在独立小分子测试集上的准确率，并只在返回有效预测结果的位点上取平均，其中真实受体条件下有</ns1:t>
+            </ns1:r>
+            <ns1:r>
+              <ns1:rPr lang="en-US" altLang="zh-CN" dirty="0"/>
+              <ns1:t>282 </ns1:t>
+            </ns1:r>
+            <ns1:r>
+              <ns1:rPr lang="zh-CN" altLang="en-US" dirty="0"/>
+              <ns1:t>个位点返回了预测结果，</ns1:t>
+            </ns1:r>
+            <ns1:r>
+              <ns1:rPr lang="en-US" altLang="zh-CN" dirty="0"/>
+              <ns1:t>CryoAtom2 </ns1:t>
+            </ns1:r>
+            <ns1:r>
+              <ns1:rPr lang="zh-CN" altLang="en-US" dirty="0"/>
+              <ns1:t>条件下则有</ns1:t>
+            </ns1:r>
+            <ns1:r>
+              <ns1:rPr lang="en-US" altLang="zh-CN" dirty="0"/>
+              <ns1:t>313 </ns1:t>
+            </ns1:r>
+            <ns1:r>
+              <ns1:rPr lang="zh-CN" altLang="en-US" dirty="0"/>
+              <ns1:t>个位点返回了预测结果。</ns1:t>
+            </ns1:r>
+            <ns1:endParaRPr lang="en-US" dirty="0"/>
+          </ns1:p>
+        </ns0:txBody>
+      </ns0:sp>
+      <ns0:sp>
+        <ns0:nvSpPr>
+          <ns0:cNvPr id="4" name="Slide Number Placeholder 3"/>
+          <ns0:cNvSpPr>
+            <ns1:spLocks noGrp="1"/>
+          </ns0:cNvSpPr>
+          <ns0:nvPr>
+            <ns0:ph type="sldNum" sz="quarter" idx="10"/>
+          </ns0:nvPr>
+        </ns0:nvSpPr>
+        <ns0:spPr/>
+        <ns0:txBody>
+          <ns1:bodyPr/>
+          <ns1:lstStyle/>
+          <ns1:p>
+            <ns1:fld id="{F7021451-1387-4CA6-816F-3879F97B5CBC}" type="slidenum">
+              <ns1:rPr lang="en-US"/>
+              <ns1:t>1</ns1:t>
+            </ns1:fld>
+            <ns1:endParaRPr lang="en-US"/>
+          </ns1:p>
+        </ns0:txBody>
+      </ns0:sp>
+    </ns0:spTree>
+    <ns0:extLst>
+      <ns0:ext uri="{BB962C8B-B14F-4D97-AF65-F5344CB8AC3E}">
+        <ns2:creationId val="1024086991"/>
+      </ns0:ext>
+    </ns0:extLst>
+  </ns0:cSld>
+  <ns0:clrMapOvr>
+    <ns1:masterClrMapping/>
+  </ns0:clrMapOvr>
+</ns0:notes>
 </file>
 
 <file path=ppt/notesSlides/notesSlide2.xml><?xml version="1.0" encoding="utf-8"?>
-<p:notes xmlns:a="http://schemas.openxmlformats.org/drawingml/2006/main" xmlns:r="http://schemas.openxmlformats.org/officeDocument/2006/relationships" xmlns:p="http://schemas.openxmlformats.org/presentationml/2006/main">
-  <p:cSld>
-    <p:spTree>
-      <p:nvGrpSpPr>
-        <p:cNvPr id="1" name=""/>
-        <p:cNvGrpSpPr/>
-        <p:nvPr/>
-      </p:nvGrpSpPr>
-      <p:grpSpPr>
-        <a:xfrm>
-          <a:off x="0" y="0"/>
-          <a:ext cx="0" cy="0"/>
-          <a:chOff x="0" y="0"/>
-          <a:chExt cx="0" cy="0"/>
-        </a:xfrm>
-      </p:grpSpPr>
-      <p:sp>
-        <p:nvSpPr>
-          <p:cNvPr id="2" name="Slide Image Placeholder 1"/>
-          <p:cNvSpPr>
-            <a:spLocks noGrp="1" noRot="1" noChangeAspect="1"/>
-          </p:cNvSpPr>
-          <p:nvPr>
-            <p:ph type="sldImg"/>
-          </p:nvPr>
-        </p:nvSpPr>
-        <p:spPr/>
-      </p:sp>
-      <p:sp>
-        <p:nvSpPr>
-          <p:cNvPr id="3" name="Notes Placeholder 2"/>
-          <p:cNvSpPr>
-            <a:spLocks noGrp="1"/>
-          </p:cNvSpPr>
-          <p:nvPr>
-            <p:ph type="body" idx="1"/>
-          </p:nvPr>
-        </p:nvSpPr>
-        <p:spPr/>
-        <p:txBody>
-          <a:bodyPr/>
-          <a:lstStyle/>
-          <a:p>
-            <a:r>
-              <a:rPr lang="zh-CN" altLang="zh-CN" dirty="0"/>
-              <a:t>图 5 | strongest 模型在真实受体（a）和 CryoAtom2受体（b）条件下的配体身份匹配精度，与竞争的配体身份数的关系。在真实受体条件下，竞争配体身份数为1，2，3，4，</a:t>
-            </a:r>
-            <a:r>
-              <a:rPr lang="en-US" altLang="zh-CN" dirty="0"/>
-              <a:t>&gt;=</a:t>
-            </a:r>
-            <a:r>
-              <a:rPr lang="zh-CN" altLang="zh-CN" dirty="0"/>
-              <a:t>5的位点分别有419、459、113、85、162；在CryoAtom2 条件下，竞争配体身份数为1，2，3，4，</a:t>
-            </a:r>
-            <a:r>
-              <a:rPr lang="en-US" altLang="zh-CN" dirty="0"/>
-              <a:t>&gt;=</a:t>
-            </a:r>
-            <a:r>
-              <a:rPr lang="zh-CN" altLang="zh-CN" dirty="0"/>
-              <a:t>5的位点分别有413、443、91、63、150。竞争配体身份数为1，意味着这个候选区域所在的PDB中只有一种配体身份，准确率自然为100%。</a:t>
-            </a:r>
-            <a:endParaRPr lang="en-US" dirty="0"/>
-          </a:p>
-        </p:txBody>
-      </p:sp>
-      <p:sp>
-        <p:nvSpPr>
-          <p:cNvPr id="4" name="Slide Number Placeholder 3"/>
-          <p:cNvSpPr>
-            <a:spLocks noGrp="1"/>
-          </p:cNvSpPr>
-          <p:nvPr>
-            <p:ph type="sldNum" sz="quarter" idx="10"/>
-          </p:nvPr>
-        </p:nvSpPr>
-        <p:spPr/>
-        <p:txBody>
-          <a:bodyPr/>
-          <a:lstStyle/>
-          <a:p>
-            <a:fld id="{F7021451-1387-4CA6-816F-3879F97B5CBC}" type="slidenum">
-              <a:rPr lang="en-US"/>
-              <a:t>2</a:t>
-            </a:fld>
-            <a:endParaRPr lang="en-US"/>
-          </a:p>
-        </p:txBody>
-      </p:sp>
-    </p:spTree>
-    <p:extLst>
-      <p:ext uri="{BB962C8B-B14F-4D97-AF65-F5344CB8AC3E}">
-        <p14:creationId xmlns:p14="http://schemas.microsoft.com/office/powerpoint/2010/main" val="1024086991"/>
-      </p:ext>
-    </p:extLst>
-  </p:cSld>
-  <p:clrMapOvr>
-    <a:masterClrMapping/>
-  </p:clrMapOvr>
-</p:notes>
+<ns0:notes xmlns:ns0="http://schemas.openxmlformats.org/presentationml/2006/main" xmlns:ns1="http://schemas.openxmlformats.org/drawingml/2006/main" xmlns:ns2="http://schemas.microsoft.com/office/powerpoint/2010/main">
+  <ns0:cSld>
+    <ns0:spTree>
+      <ns0:nvGrpSpPr>
+        <ns0:cNvPr id="1" name=""/>
+        <ns0:cNvGrpSpPr/>
+        <ns0:nvPr/>
+      </ns0:nvGrpSpPr>
+      <ns0:grpSpPr>
+        <ns1:xfrm>
+          <ns1:off x="0" y="0"/>
+          <ns1:ext cx="0" cy="0"/>
+          <ns1:chOff x="0" y="0"/>
+          <ns1:chExt cx="0" cy="0"/>
+        </ns1:xfrm>
+      </ns0:grpSpPr>
+      <ns0:sp>
+        <ns0:nvSpPr>
+          <ns0:cNvPr id="2" name="Slide Image Placeholder 1"/>
+          <ns0:cNvSpPr>
+            <ns1:spLocks noGrp="1" noRot="1" noChangeAspect="1"/>
+          </ns0:cNvSpPr>
+          <ns0:nvPr>
+            <ns0:ph type="sldImg"/>
+          </ns0:nvPr>
+        </ns0:nvSpPr>
+        <ns0:spPr/>
+      </ns0:sp>
+      <ns0:sp>
+        <ns0:nvSpPr>
+          <ns0:cNvPr id="3" name="Notes Placeholder 2"/>
+          <ns0:cNvSpPr>
+            <ns1:spLocks noGrp="1"/>
+          </ns0:cNvSpPr>
+          <ns0:nvPr>
+            <ns0:ph type="body" idx="1"/>
+          </ns0:nvPr>
+        </ns0:nvSpPr>
+        <ns0:spPr/>
+        <ns0:txBody>
+          <ns1:bodyPr/>
+          <ns1:lstStyle/>
+          <ns1:p>
+            <ns1:r>
+              <ns1:rPr lang="zh-CN" altLang="zh-CN" dirty="0"/>
+              <ns1:t>strongest 模型在真实受体（a）和 CryoAtom2受体（b）条件下的配体身份匹配精度，与竞争的配体身份数的关系。在真实受体条件下，竞争配体身份数为1，2，3，4，</ns1:t>
+            </ns1:r>
+            <ns1:r>
+              <ns1:rPr lang="en-US" altLang="zh-CN" dirty="0"/>
+              <ns1:t>&gt;=</ns1:t>
+            </ns1:r>
+            <ns1:r>
+              <ns1:rPr lang="zh-CN" altLang="zh-CN" dirty="0"/>
+              <ns1:t>5的位点分别有419、459、113、85、162；在CryoAtom2 条件下，竞争配体身份数为1，2，3，4，</ns1:t>
+            </ns1:r>
+            <ns1:r>
+              <ns1:rPr lang="en-US" altLang="zh-CN" dirty="0"/>
+              <ns1:t>&gt;=</ns1:t>
+            </ns1:r>
+            <ns1:r>
+              <ns1:rPr lang="zh-CN" altLang="zh-CN" dirty="0"/>
+              <ns1:t>5的位点分别有413、443、91、63、150。竞争配体身份数为1，意味着这个候选区域所在的PDB中只有一种配体身份，准确率自然为100%。</ns1:t>
+            </ns1:r>
+            <ns1:endParaRPr lang="en-US" dirty="0"/>
+          </ns1:p>
+        </ns0:txBody>
+      </ns0:sp>
+      <ns0:sp>
+        <ns0:nvSpPr>
+          <ns0:cNvPr id="4" name="Slide Number Placeholder 3"/>
+          <ns0:cNvSpPr>
+            <ns1:spLocks noGrp="1"/>
+          </ns0:cNvSpPr>
+          <ns0:nvPr>
+            <ns0:ph type="sldNum" sz="quarter" idx="10"/>
+          </ns0:nvPr>
+        </ns0:nvSpPr>
+        <ns0:spPr/>
+        <ns0:txBody>
+          <ns1:bodyPr/>
+          <ns1:lstStyle/>
+          <ns1:p>
+            <ns1:fld id="{F7021451-1387-4CA6-816F-3879F97B5CBC}" type="slidenum">
+              <ns1:rPr lang="en-US"/>
+              <ns1:t>2</ns1:t>
+            </ns1:fld>
+            <ns1:endParaRPr lang="en-US"/>
+          </ns1:p>
+        </ns0:txBody>
+      </ns0:sp>
+    </ns0:spTree>
+    <ns0:extLst>
+      <ns0:ext uri="{BB962C8B-B14F-4D97-AF65-F5344CB8AC3E}">
+        <ns2:creationId val="1024086991"/>
+      </ns0:ext>
+    </ns0:extLst>
+  </ns0:cSld>
+  <ns0:clrMapOvr>
+    <ns1:masterClrMapping/>
+  </ns0:clrMapOvr>
+</ns0:notes>
 </file>
 
 <file path=ppt/slideLayouts/slideLayout1.xml><?xml version="1.0" encoding="utf-8"?>

--- a/画图/stage2结果.pptx
+++ b/画图/stage2结果.pptx
@@ -554,11 +554,7 @@
             </a:r>
             <a:r>
               <a:rPr lang="zh-CN" altLang="en-US" dirty="0"/>
-              <a:t>个位点返回了预测结</a:t>
-            </a:r>
-            <a:r>
-              <a:rPr lang="zh-CN" altLang="en-US"/>
-              <a:t>果。</a:t>
+              <a:t>个位点返回了预测结果。</a:t>
             </a:r>
             <a:endParaRPr lang="en-US" dirty="0"/>
           </a:p>
@@ -668,37 +664,41 @@
           </a:p>
           <a:p>
             <a:r>
-              <a:rPr lang="en-US"/>
+              <a:rPr lang="en-US" dirty="0"/>
               <a:t>ENGLISH:</a:t>
             </a:r>
           </a:p>
           <a:p>
             <a:r>
-              <a:rPr lang="en-US"/>
-              <a:t>LigandSeek-Match identity matching accuracy by number of competing ligand identities.</a:t>
+              <a:rPr lang="en-US" dirty="0" err="1"/>
+              <a:t>LigandSeek</a:t>
+            </a:r>
+            <a:r>
+              <a:rPr lang="en-US" dirty="0"/>
+              <a:t>-Match identity matching accuracy by number of competing ligand identities.</a:t>
             </a:r>
           </a:p>
           <a:p>
             <a:r>
-              <a:rPr lang="en-US"/>
+              <a:rPr lang="en-US" dirty="0"/>
               <a:t>a, Results for the strongest model with deposited receptor structures.</a:t>
             </a:r>
           </a:p>
           <a:p>
             <a:r>
-              <a:rPr lang="en-US"/>
+              <a:rPr lang="en-US" dirty="0"/>
               <a:t>b, Corresponding results for the strongest model with CryoAtom2-reconstructed receptor structures.</a:t>
             </a:r>
           </a:p>
           <a:p>
             <a:r>
-              <a:rPr lang="en-US"/>
+              <a:rPr lang="en-US" dirty="0"/>
               <a:t>With deposited receptors, groups with 1, 2, 3, 4 and ≥5 competing identities contain 419, 459, 113, 85 and 162 sites, respectively. With CryoAtom2-reconstructed receptors, the corresponding groups contain 413, 443, 91, 63 and 150 sites, respectively.</a:t>
             </a:r>
           </a:p>
           <a:p>
             <a:r>
-              <a:rPr lang="en-US"/>
+              <a:rPr lang="en-US" dirty="0"/>
               <a:t>One competing identity means that the candidate region belongs to a PDB entry containing only one ligand identity, giving 100% matching accuracy by definition.</a:t>
             </a:r>
           </a:p>

--- a/画图/stage2结果.pptx
+++ b/画图/stage2结果.pptx
@@ -1570,7 +1570,7 @@
         </p:nvSpPr>
         <p:spPr>
           <a:xfrm>
-            <a:off x="3251200" y="4889500"/>
+            <a:off x="3296920" y="4874260"/>
             <a:ext cx="2082800" cy="279400"/>
           </a:xfrm>
           <a:prstGeom prst="rect">
@@ -1587,7 +1587,7 @@
               <a:buNone/>
             </a:pPr>
             <a:r>
-              <a:rPr lang="en-US" sz="1400" dirty="0">
+              <a:rPr lang="en-US" sz="1400" i="1" dirty="0">
                 <a:solidFill>
                   <a:srgbClr val="202830"/>
                 </a:solidFill>
@@ -1597,7 +1597,7 @@
               </a:rPr>
               <a:t>Foreground F1</a:t>
             </a:r>
-            <a:endParaRPr lang="en-US" sz="1400" dirty="0"/>
+            <a:endParaRPr lang="en-US" sz="1400" i="1" dirty="0"/>
           </a:p>
         </p:txBody>
       </p:sp>
@@ -3807,7 +3807,7 @@
         </p:nvSpPr>
         <p:spPr>
           <a:xfrm>
-            <a:off x="3251200" y="10160000"/>
+            <a:off x="3296920" y="10144760"/>
             <a:ext cx="2082800" cy="279400"/>
           </a:xfrm>
           <a:prstGeom prst="rect">
@@ -3823,6 +3823,16 @@
             <a:pPr marL="0" indent="0" algn="ctr">
               <a:buNone/>
             </a:pPr>
+            <a:r>
+              <a:rPr lang="en-US" sz="1400" i="1" dirty="0">
+                <a:solidFill>
+                  <a:srgbClr val="202830"/>
+                </a:solidFill>
+                <a:latin typeface="Arial" pitchFamily="34" charset="0"/>
+                <a:cs typeface="Arial" pitchFamily="34" charset="-120"/>
+              </a:rPr>
+              <a:t>Foreground</a:t>
+            </a:r>
             <a:r>
               <a:rPr lang="en-US" sz="1400" dirty="0">
                 <a:solidFill>
@@ -3832,7 +3842,7 @@
                 <a:ea typeface="Arial" pitchFamily="34" charset="-122"/>
                 <a:cs typeface="Arial" pitchFamily="34" charset="-120"/>
               </a:rPr>
-              <a:t>Foreground F1</a:t>
+              <a:t> F1</a:t>
             </a:r>
             <a:endParaRPr lang="en-US" sz="1400" dirty="0"/>
           </a:p>
